--- a/Architecture Diagram.pptx
+++ b/Architecture Diagram.pptx
@@ -104,6 +104,11 @@
       </a:defRPr>
     </a:lvl9pPr>
   </p:defaultTextStyle>
+  <p:extLst>
+    <p:ext uri="{EFAFB233-063F-42B5-8137-9DF3F51BA10A}">
+      <p15:sldGuideLst xmlns:p15="http://schemas.microsoft.com/office/powerpoint/2012/main"/>
+    </p:ext>
+  </p:extLst>
 </p:presentation>
 </file>
 
@@ -4137,7 +4142,7 @@
             <a:p>
               <a:r>
                 <a:rPr lang="en-GB" sz="1100" dirty="0"/>
-                <a:t>Report Hash + salt is submitted to the smart contract. </a:t>
+                <a:t>Report Hash is submitted to the smart contract. </a:t>
               </a:r>
             </a:p>
             <a:p>
@@ -5307,7 +5312,7 @@
             <a:p>
               <a:r>
                 <a:rPr lang="en-GB" sz="1000" noProof="0" dirty="0"/>
-                <a:t>Encrypted Copy Shared with Regular</a:t>
+                <a:t>Encrypted Copy Shared with Regulator</a:t>
               </a:r>
             </a:p>
           </p:txBody>
@@ -6090,7 +6095,7 @@
         <p:spPr>
           <a:xfrm>
             <a:off x="2603500" y="5682892"/>
-            <a:ext cx="924860" cy="584775"/>
+            <a:ext cx="924860" cy="461665"/>
           </a:xfrm>
           <a:prstGeom prst="rect">
             <a:avLst/>
@@ -6107,7 +6112,7 @@
           <a:p>
             <a:r>
               <a:rPr lang="en-GB" sz="800" dirty="0"/>
-              <a:t>Generated Hash + Salt is submitted to smart contract</a:t>
+              <a:t>Report Hash  is submitted to smart contract</a:t>
             </a:r>
           </a:p>
         </p:txBody>
